--- a/dvs_noise_inverse_problem/dvs_noise_inverse_problem_figures.pptx
+++ b/dvs_noise_inverse_problem/dvs_noise_inverse_problem_figures.pptx
@@ -3115,7 +3115,7 @@
               <a:defRPr sz="2000" b="1"/>
             </a:pPr>
             <a:r>
-              <a:t>Fig. 1: DVS × ノイズ逆問題 — 4領域と未開拓ギャップの俯瞰図</a:t>
+              <a:t>Fig. 1: DVS × ノイズ逆問題 — 4領域と5つの未開拓ギャップ（G1–G5）</a:t>
             </a:r>
           </a:p>
         </p:txBody>
@@ -3136,8 +3136,8 @@
         </p:blipFill>
         <p:spPr>
           <a:xfrm>
-            <a:off x="3718205" y="914400"/>
-            <a:ext cx="4755285" cy="5029200"/>
+            <a:off x="3702808" y="914400"/>
+            <a:ext cx="4786079" cy="5029200"/>
           </a:xfrm>
           <a:prstGeom prst="rect">
             <a:avLst/>
@@ -3174,7 +3174,7 @@
               </a:defRPr>
             </a:pPr>
             <a:r>
-              <a:t>先行研究を4領域（A: DVSノイズ物理モデリング、B: DVSノイズフィルタリング、C: DVS天文応用、D: ノイズ逆問題）に分類し、交差領域に4つの未開拓ギャップ（g1–g4）を同定。g4が最も野心的な全統合アプローチ。</a:t>
+              <a:t>先行研究を4領域（A: DVSノイズ物理モデリング、B: DVSノイズフィルタリング、C: DVS天文応用、D: ノイズ逆問題）に分類し、5つの未開拓ギャップ（G1–G5）を同定。G3（天文パイプライン）とG4（テンプレートフリー検出）が最も探索価値の高い領域。</a:t>
             </a:r>
           </a:p>
         </p:txBody>
@@ -3223,14 +3223,14 @@
               <a:defRPr sz="2000" b="1"/>
             </a:pPr>
             <a:r>
-              <a:t>Fig. 2: g4 全統合パイプライン — LIGO → DVS 移植アーキテクチャ</a:t>
+              <a:t>Fig. 2: G3天文パイプライン + G4テンプレートフリー検出</a:t>
             </a:r>
           </a:p>
         </p:txBody>
       </p:sp>
       <p:pic>
         <p:nvPicPr>
-          <p:cNvPr id="3" name="Picture 2" descr="fig2_g4_pipeline.png"/>
+          <p:cNvPr id="3" name="Picture 2" descr="fig2_g3_pipeline.png"/>
           <p:cNvPicPr>
             <a:picLocks noChangeAspect="1"/>
           </p:cNvPicPr>
@@ -3282,7 +3282,7 @@
               </a:defRPr>
             </a:pPr>
             <a:r>
-              <a:t>LIGOのノイズ再構成パイプライン（Vajente et al. 2020）をDVS天文観測に移植する5段階アーキテクチャ。DVS主チャンネル・補助センサー・物理モデル（A5）を入力とし、ノイズ逆問題求解→残差生成→微弱天体検出→物理的検証の一貫パイプライン。</a:t>
+              <a:t>LIGOのノイズ再構成パイプライン（Vajente et al. 2020）をDVS天文観測に移植する4段階アーキテクチャ（G3）。Stage 4ではG4のテンプレートフリー検出——ノイズを解いて残差から未知天体を発見——を統合。</a:t>
             </a:r>
           </a:p>
         </p:txBody>
